--- a/Documentation/Slides/Week_22.pptx
+++ b/Documentation/Slides/Week_22.pptx
@@ -5,42 +5,47 @@
     <p:sldMasterId id="2147483648" r:id="rId4"/>
   </p:sldMasterIdLst>
   <p:notesMasterIdLst>
-    <p:notesMasterId r:id="rId9"/>
+    <p:notesMasterId r:id="rId14"/>
   </p:notesMasterIdLst>
   <p:sldIdLst>
     <p:sldId id="267" r:id="rId5"/>
     <p:sldId id="279" r:id="rId6"/>
-    <p:sldId id="299" r:id="rId7"/>
-    <p:sldId id="277" r:id="rId8"/>
+    <p:sldId id="301" r:id="rId7"/>
+    <p:sldId id="302" r:id="rId8"/>
+    <p:sldId id="303" r:id="rId9"/>
+    <p:sldId id="304" r:id="rId10"/>
+    <p:sldId id="305" r:id="rId11"/>
+    <p:sldId id="299" r:id="rId12"/>
+    <p:sldId id="277" r:id="rId13"/>
   </p:sldIdLst>
   <p:sldSz cx="9144000" cy="6858000" type="screen4x3"/>
   <p:notesSz cx="6858000" cy="9144000"/>
   <p:embeddedFontLst>
     <p:embeddedFont>
       <p:font typeface="Acumin Pro Condensed Semibold" panose="020B0706020202020204" pitchFamily="34" charset="77"/>
-      <p:regular r:id="rId10"/>
-      <p:bold r:id="rId11"/>
-      <p:italic r:id="rId12"/>
-      <p:boldItalic r:id="rId13"/>
+      <p:regular r:id="rId15"/>
+      <p:bold r:id="rId16"/>
+      <p:italic r:id="rId17"/>
+      <p:boldItalic r:id="rId18"/>
     </p:embeddedFont>
     <p:embeddedFont>
       <p:font typeface="Acumin Pro Medium" panose="020B0604020202020204" pitchFamily="34" charset="77"/>
-      <p:regular r:id="rId14"/>
-      <p:italic r:id="rId15"/>
+      <p:regular r:id="rId19"/>
+      <p:italic r:id="rId20"/>
     </p:embeddedFont>
     <p:embeddedFont>
       <p:font typeface="Franklin Gothic Book" panose="020B0503020102020204" pitchFamily="34" charset="0"/>
-      <p:regular r:id="rId16"/>
-      <p:italic r:id="rId17"/>
+      <p:regular r:id="rId21"/>
+      <p:italic r:id="rId22"/>
     </p:embeddedFont>
     <p:embeddedFont>
       <p:font typeface="Franklin Gothic Medium" panose="020B0603020102020204" pitchFamily="34" charset="0"/>
-      <p:regular r:id="rId18"/>
-      <p:italic r:id="rId19"/>
+      <p:regular r:id="rId23"/>
+      <p:italic r:id="rId24"/>
     </p:embeddedFont>
     <p:embeddedFont>
       <p:font typeface="Franklin Gothic Medium Cond" panose="020B0606030402020204" pitchFamily="34" charset="0"/>
-      <p:regular r:id="rId20"/>
+      <p:regular r:id="rId25"/>
     </p:embeddedFont>
   </p:embeddedFontLst>
   <p:defaultTextStyle>
@@ -793,7 +798,7 @@
           <a:p>
             <a:fld id="{237BF745-0557-B241-863F-056113C7032A}" type="slidenum">
               <a:rPr lang="en-US" smtClean="0"/>
-              <a:t>3</a:t>
+              <a:t>8</a:t>
             </a:fld>
             <a:endParaRPr lang="en-US"/>
           </a:p>
@@ -13869,27 +13874,7 @@
             </a:pPr>
             <a:r>
               <a:rPr lang="en-US" dirty="0"/>
-              <a:t>Furthered Data Analysis of IMU</a:t>
-            </a:r>
-          </a:p>
-          <a:p>
-            <a:pPr marL="628650" lvl="1" indent="-285750">
-              <a:buFont typeface="Arial" panose="020B0604020202020204" pitchFamily="34" charset="0"/>
-              <a:buChar char="•"/>
-            </a:pPr>
-            <a:r>
-              <a:rPr lang="en-US" dirty="0"/>
-              <a:t>New Study Conducted</a:t>
-            </a:r>
-          </a:p>
-          <a:p>
-            <a:pPr marL="628650" lvl="1" indent="-285750">
-              <a:buFont typeface="Arial" panose="020B0604020202020204" pitchFamily="34" charset="0"/>
-              <a:buChar char="•"/>
-            </a:pPr>
-            <a:r>
-              <a:rPr lang="en-US" dirty="0"/>
-              <a:t>Verification Successful</a:t>
+              <a:t>Shipment Updates</a:t>
             </a:r>
           </a:p>
           <a:p>
@@ -13899,17 +13884,7 @@
             </a:pPr>
             <a:r>
               <a:rPr lang="en-US" dirty="0"/>
-              <a:t>Research on RF to DC Converters</a:t>
-            </a:r>
-          </a:p>
-          <a:p>
-            <a:pPr marL="628650" lvl="1" indent="-285750">
-              <a:buFont typeface="Arial" panose="020B0604020202020204" pitchFamily="34" charset="0"/>
-              <a:buChar char="•"/>
-            </a:pPr>
-            <a:r>
-              <a:rPr lang="en-US" dirty="0"/>
-              <a:t>915 MHz Band Research Paper</a:t>
+              <a:t>Agriculture Department Updates</a:t>
             </a:r>
           </a:p>
           <a:p>
@@ -13918,22 +13893,8 @@
               <a:buChar char="•"/>
             </a:pPr>
             <a:r>
-              <a:rPr lang="en-US" dirty="0" err="1"/>
-              <a:t>DigiKey</a:t>
-            </a:r>
-            <a:r>
-              <a:rPr lang="en-US" dirty="0"/>
-              <a:t> Parts Ordering</a:t>
-            </a:r>
-          </a:p>
-          <a:p>
-            <a:pPr marL="628650" lvl="1" indent="-285750">
-              <a:buFont typeface="Arial" panose="020B0604020202020204" pitchFamily="34" charset="0"/>
-              <a:buChar char="•"/>
-            </a:pPr>
-            <a:r>
-              <a:rPr lang="en-US" dirty="0"/>
-              <a:t>Parts List Curated – F Number Required (Procurement Office)</a:t>
+              <a:rPr lang="en-US" dirty="0"/>
+              <a:t>Conference Updates</a:t>
             </a:r>
           </a:p>
           <a:p>
@@ -13943,17 +13904,17 @@
             </a:pPr>
             <a:r>
               <a:rPr lang="en-US" dirty="0"/>
-              <a:t>Agriculture Components</a:t>
-            </a:r>
-          </a:p>
-          <a:p>
-            <a:pPr marL="628650" lvl="1" indent="-285750">
+              <a:t>PCB Manufacturing Updates</a:t>
+            </a:r>
+          </a:p>
+          <a:p>
+            <a:pPr marL="285750" indent="-285750">
               <a:buFont typeface="Arial" panose="020B0604020202020204" pitchFamily="34" charset="0"/>
               <a:buChar char="•"/>
             </a:pPr>
             <a:r>
               <a:rPr lang="en-US" dirty="0"/>
-              <a:t>Sent electrical components needed for study to department</a:t>
+              <a:t>Miscellaneous Updates</a:t>
             </a:r>
           </a:p>
           <a:p>
@@ -14064,6 +14025,976 @@
 </file>
 
 <file path=ppt/slides/slide3.xml><?xml version="1.0" encoding="utf-8"?>
+<p:sld xmlns:a="http://schemas.openxmlformats.org/drawingml/2006/main" xmlns:r="http://schemas.openxmlformats.org/officeDocument/2006/relationships" xmlns:p="http://schemas.openxmlformats.org/presentationml/2006/main">
+  <p:cSld>
+    <p:spTree>
+      <p:nvGrpSpPr>
+        <p:cNvPr id="1" name=""/>
+        <p:cNvGrpSpPr/>
+        <p:nvPr/>
+      </p:nvGrpSpPr>
+      <p:grpSpPr>
+        <a:xfrm>
+          <a:off x="0" y="0"/>
+          <a:ext cx="0" cy="0"/>
+          <a:chOff x="0" y="0"/>
+          <a:chExt cx="0" cy="0"/>
+        </a:xfrm>
+      </p:grpSpPr>
+      <p:sp>
+        <p:nvSpPr>
+          <p:cNvPr id="3" name="Text Placeholder 2">
+            <a:extLst>
+              <a:ext uri="{FF2B5EF4-FFF2-40B4-BE49-F238E27FC236}">
+                <a16:creationId xmlns:a16="http://schemas.microsoft.com/office/drawing/2014/main" id="{D86F0A4E-B4E7-586E-4E0C-DEDB67BAF812}"/>
+              </a:ext>
+            </a:extLst>
+          </p:cNvPr>
+          <p:cNvSpPr>
+            <a:spLocks noGrp="1"/>
+          </p:cNvSpPr>
+          <p:nvPr>
+            <p:ph type="body" sz="quarter" idx="10"/>
+          </p:nvPr>
+        </p:nvSpPr>
+        <p:spPr>
+          <a:xfrm>
+            <a:off x="346982" y="1080187"/>
+            <a:ext cx="8450035" cy="4454706"/>
+          </a:xfrm>
+        </p:spPr>
+        <p:txBody>
+          <a:bodyPr/>
+          <a:lstStyle/>
+          <a:p>
+            <a:pPr marL="285750" indent="-285750">
+              <a:buFont typeface="Arial" panose="020B0604020202020204" pitchFamily="34" charset="0"/>
+              <a:buChar char="•"/>
+            </a:pPr>
+            <a:r>
+              <a:rPr lang="en-US" dirty="0"/>
+              <a:t>Digi-Key parts ordered with F number</a:t>
+            </a:r>
+          </a:p>
+          <a:p>
+            <a:pPr marL="628650" lvl="1" indent="-285750">
+              <a:buFont typeface="Arial" panose="020B0604020202020204" pitchFamily="34" charset="0"/>
+              <a:buChar char="•"/>
+            </a:pPr>
+            <a:r>
+              <a:rPr lang="en-US" dirty="0"/>
+              <a:t>Should be arriving with this week</a:t>
+            </a:r>
+          </a:p>
+          <a:p>
+            <a:pPr marL="285750" indent="-285750">
+              <a:buFont typeface="Arial" panose="020B0604020202020204" pitchFamily="34" charset="0"/>
+              <a:buChar char="•"/>
+            </a:pPr>
+            <a:r>
+              <a:rPr lang="en-US" dirty="0"/>
+              <a:t>PCBs seemed to have arrived, however</a:t>
+            </a:r>
+          </a:p>
+          <a:p>
+            <a:pPr marL="628650" lvl="1" indent="-285750">
+              <a:buFont typeface="Arial" panose="020B0604020202020204" pitchFamily="34" charset="0"/>
+              <a:buChar char="•"/>
+            </a:pPr>
+            <a:r>
+              <a:rPr lang="en-US" dirty="0"/>
+              <a:t>Unsure where they went as when checking the dock where the tracking link said they were, they were not present</a:t>
+            </a:r>
+          </a:p>
+          <a:p>
+            <a:pPr marL="285750" indent="-285750">
+              <a:buFont typeface="Arial" panose="020B0604020202020204" pitchFamily="34" charset="0"/>
+              <a:buChar char="•"/>
+            </a:pPr>
+            <a:r>
+              <a:rPr lang="en-US" dirty="0"/>
+              <a:t>Sensors ordered</a:t>
+            </a:r>
+          </a:p>
+          <a:p>
+            <a:pPr marL="628650" lvl="1" indent="-285750">
+              <a:buFont typeface="Arial" panose="020B0604020202020204" pitchFamily="34" charset="0"/>
+              <a:buChar char="•"/>
+            </a:pPr>
+            <a:r>
+              <a:rPr lang="en-US" dirty="0"/>
+              <a:t>Force, Strain</a:t>
+            </a:r>
+          </a:p>
+          <a:p>
+            <a:pPr marL="628650" lvl="1" indent="-285750">
+              <a:buFont typeface="Arial" panose="020B0604020202020204" pitchFamily="34" charset="0"/>
+              <a:buChar char="•"/>
+            </a:pPr>
+            <a:r>
+              <a:rPr lang="en-US" dirty="0"/>
+              <a:t>Should come within 1-2 weeks</a:t>
+            </a:r>
+          </a:p>
+        </p:txBody>
+      </p:sp>
+      <p:sp>
+        <p:nvSpPr>
+          <p:cNvPr id="4" name="Title 3">
+            <a:extLst>
+              <a:ext uri="{FF2B5EF4-FFF2-40B4-BE49-F238E27FC236}">
+                <a16:creationId xmlns:a16="http://schemas.microsoft.com/office/drawing/2014/main" id="{060AF688-38BA-EEBB-31A3-1306518A4B9C}"/>
+              </a:ext>
+            </a:extLst>
+          </p:cNvPr>
+          <p:cNvSpPr>
+            <a:spLocks noGrp="1"/>
+          </p:cNvSpPr>
+          <p:nvPr>
+            <p:ph type="title"/>
+          </p:nvPr>
+        </p:nvSpPr>
+        <p:spPr/>
+        <p:txBody>
+          <a:bodyPr>
+            <a:normAutofit/>
+          </a:bodyPr>
+          <a:lstStyle/>
+          <a:p>
+            <a:r>
+              <a:rPr lang="en-US" dirty="0"/>
+              <a:t>Shipment Updates</a:t>
+            </a:r>
+          </a:p>
+        </p:txBody>
+      </p:sp>
+      <p:sp>
+        <p:nvSpPr>
+          <p:cNvPr id="5" name="Footer Placeholder 4">
+            <a:extLst>
+              <a:ext uri="{FF2B5EF4-FFF2-40B4-BE49-F238E27FC236}">
+                <a16:creationId xmlns:a16="http://schemas.microsoft.com/office/drawing/2014/main" id="{095C7498-558D-A3D3-0EC3-B3F7A7E8A28F}"/>
+              </a:ext>
+            </a:extLst>
+          </p:cNvPr>
+          <p:cNvSpPr>
+            <a:spLocks noGrp="1"/>
+          </p:cNvSpPr>
+          <p:nvPr>
+            <p:ph type="ftr" sz="quarter" idx="12"/>
+          </p:nvPr>
+        </p:nvSpPr>
+        <p:spPr/>
+        <p:txBody>
+          <a:bodyPr/>
+          <a:lstStyle/>
+          <a:p>
+            <a:pPr algn="r"/>
+            <a:r>
+              <a:rPr lang="en-US"/>
+              <a:t>3/31/23            ‹#›</a:t>
+            </a:r>
+            <a:endParaRPr lang="en-US" dirty="0"/>
+          </a:p>
+        </p:txBody>
+      </p:sp>
+    </p:spTree>
+    <p:extLst>
+      <p:ext uri="{BB962C8B-B14F-4D97-AF65-F5344CB8AC3E}">
+        <p14:creationId xmlns:p14="http://schemas.microsoft.com/office/powerpoint/2010/main" val="2262391918"/>
+      </p:ext>
+    </p:extLst>
+  </p:cSld>
+  <p:clrMapOvr>
+    <a:masterClrMapping/>
+  </p:clrMapOvr>
+</p:sld>
+</file>
+
+<file path=ppt/slides/slide4.xml><?xml version="1.0" encoding="utf-8"?>
+<p:sld xmlns:a="http://schemas.openxmlformats.org/drawingml/2006/main" xmlns:r="http://schemas.openxmlformats.org/officeDocument/2006/relationships" xmlns:p="http://schemas.openxmlformats.org/presentationml/2006/main">
+  <p:cSld>
+    <p:spTree>
+      <p:nvGrpSpPr>
+        <p:cNvPr id="1" name="">
+          <a:extLst>
+            <a:ext uri="{FF2B5EF4-FFF2-40B4-BE49-F238E27FC236}">
+              <a16:creationId xmlns:a16="http://schemas.microsoft.com/office/drawing/2014/main" id="{1D016BDA-9A88-916E-A325-7240EFA4CB23}"/>
+            </a:ext>
+          </a:extLst>
+        </p:cNvPr>
+        <p:cNvGrpSpPr/>
+        <p:nvPr/>
+      </p:nvGrpSpPr>
+      <p:grpSpPr>
+        <a:xfrm>
+          <a:off x="0" y="0"/>
+          <a:ext cx="0" cy="0"/>
+          <a:chOff x="0" y="0"/>
+          <a:chExt cx="0" cy="0"/>
+        </a:xfrm>
+      </p:grpSpPr>
+      <p:sp>
+        <p:nvSpPr>
+          <p:cNvPr id="3" name="Text Placeholder 2">
+            <a:extLst>
+              <a:ext uri="{FF2B5EF4-FFF2-40B4-BE49-F238E27FC236}">
+                <a16:creationId xmlns:a16="http://schemas.microsoft.com/office/drawing/2014/main" id="{0AC721A7-FE05-1EDE-2014-0DBB1C3432F9}"/>
+              </a:ext>
+            </a:extLst>
+          </p:cNvPr>
+          <p:cNvSpPr>
+            <a:spLocks noGrp="1"/>
+          </p:cNvSpPr>
+          <p:nvPr>
+            <p:ph type="body" sz="quarter" idx="10"/>
+          </p:nvPr>
+        </p:nvSpPr>
+        <p:spPr>
+          <a:xfrm>
+            <a:off x="346982" y="1080187"/>
+            <a:ext cx="8450035" cy="4454706"/>
+          </a:xfrm>
+        </p:spPr>
+        <p:txBody>
+          <a:bodyPr/>
+          <a:lstStyle/>
+          <a:p>
+            <a:pPr marL="285750" indent="-285750">
+              <a:buFont typeface="Arial" panose="020B0604020202020204" pitchFamily="34" charset="0"/>
+              <a:buChar char="•"/>
+            </a:pPr>
+            <a:r>
+              <a:rPr lang="en-US" dirty="0"/>
+              <a:t>Agriculture has ordered everything necessary</a:t>
+            </a:r>
+          </a:p>
+          <a:p>
+            <a:pPr marL="628650" lvl="1" indent="-285750">
+              <a:buFont typeface="Arial" panose="020B0604020202020204" pitchFamily="34" charset="0"/>
+              <a:buChar char="•"/>
+            </a:pPr>
+            <a:r>
+              <a:rPr lang="en-US" dirty="0"/>
+              <a:t>2 Pin JST Housings</a:t>
+            </a:r>
+          </a:p>
+          <a:p>
+            <a:pPr marL="628650" lvl="1" indent="-285750">
+              <a:buFont typeface="Arial" panose="020B0604020202020204" pitchFamily="34" charset="0"/>
+              <a:buChar char="•"/>
+            </a:pPr>
+            <a:r>
+              <a:rPr lang="en-US" dirty="0"/>
+              <a:t>Single Cage DuPont Housings</a:t>
+            </a:r>
+          </a:p>
+          <a:p>
+            <a:pPr marL="628650" lvl="1" indent="-285750">
+              <a:buFont typeface="Arial" panose="020B0604020202020204" pitchFamily="34" charset="0"/>
+              <a:buChar char="•"/>
+            </a:pPr>
+            <a:r>
+              <a:rPr lang="en-US" dirty="0"/>
+              <a:t>(All of the above is for the battery cables)</a:t>
+            </a:r>
+          </a:p>
+          <a:p>
+            <a:pPr marL="628650" lvl="1" indent="-285750">
+              <a:buFont typeface="Arial" panose="020B0604020202020204" pitchFamily="34" charset="0"/>
+              <a:buChar char="•"/>
+            </a:pPr>
+            <a:r>
+              <a:rPr lang="en-US" dirty="0"/>
+              <a:t>LiPo Battery Chargers</a:t>
+            </a:r>
+          </a:p>
+          <a:p>
+            <a:pPr marL="285750" indent="-285750">
+              <a:buFont typeface="Arial" panose="020B0604020202020204" pitchFamily="34" charset="0"/>
+              <a:buChar char="•"/>
+            </a:pPr>
+            <a:r>
+              <a:rPr lang="en-US" dirty="0"/>
+              <a:t>Will show agriculture how to create the cables necessary for their study</a:t>
+            </a:r>
+          </a:p>
+          <a:p>
+            <a:pPr marL="285750" indent="-285750">
+              <a:buFont typeface="Arial" panose="020B0604020202020204" pitchFamily="34" charset="0"/>
+              <a:buChar char="•"/>
+            </a:pPr>
+            <a:r>
+              <a:rPr lang="en-US" dirty="0"/>
+              <a:t>Have relayed that we do not need high quality data, just something for our paper</a:t>
+            </a:r>
+          </a:p>
+          <a:p>
+            <a:pPr marL="285750" indent="-285750">
+              <a:buFont typeface="Arial" panose="020B0604020202020204" pitchFamily="34" charset="0"/>
+              <a:buChar char="•"/>
+            </a:pPr>
+            <a:r>
+              <a:rPr lang="en-US" dirty="0"/>
+              <a:t>Waiting on data</a:t>
+            </a:r>
+          </a:p>
+          <a:p>
+            <a:pPr marL="628650" lvl="1" indent="-285750">
+              <a:buFont typeface="Arial" panose="020B0604020202020204" pitchFamily="34" charset="0"/>
+              <a:buChar char="•"/>
+            </a:pPr>
+            <a:r>
+              <a:rPr lang="en-US" dirty="0"/>
+              <a:t>Should come around Wednesday</a:t>
+            </a:r>
+          </a:p>
+        </p:txBody>
+      </p:sp>
+      <p:sp>
+        <p:nvSpPr>
+          <p:cNvPr id="4" name="Title 3">
+            <a:extLst>
+              <a:ext uri="{FF2B5EF4-FFF2-40B4-BE49-F238E27FC236}">
+                <a16:creationId xmlns:a16="http://schemas.microsoft.com/office/drawing/2014/main" id="{D9CD17AC-0889-D07F-38A7-C7253B70C8DC}"/>
+              </a:ext>
+            </a:extLst>
+          </p:cNvPr>
+          <p:cNvSpPr>
+            <a:spLocks noGrp="1"/>
+          </p:cNvSpPr>
+          <p:nvPr>
+            <p:ph type="title"/>
+          </p:nvPr>
+        </p:nvSpPr>
+        <p:spPr/>
+        <p:txBody>
+          <a:bodyPr>
+            <a:normAutofit/>
+          </a:bodyPr>
+          <a:lstStyle/>
+          <a:p>
+            <a:r>
+              <a:rPr lang="en-US" dirty="0"/>
+              <a:t>Agriculture Department Updates</a:t>
+            </a:r>
+          </a:p>
+        </p:txBody>
+      </p:sp>
+      <p:sp>
+        <p:nvSpPr>
+          <p:cNvPr id="5" name="Footer Placeholder 4">
+            <a:extLst>
+              <a:ext uri="{FF2B5EF4-FFF2-40B4-BE49-F238E27FC236}">
+                <a16:creationId xmlns:a16="http://schemas.microsoft.com/office/drawing/2014/main" id="{153BBC43-21FF-79E7-1240-23BE1840CFA3}"/>
+              </a:ext>
+            </a:extLst>
+          </p:cNvPr>
+          <p:cNvSpPr>
+            <a:spLocks noGrp="1"/>
+          </p:cNvSpPr>
+          <p:nvPr>
+            <p:ph type="ftr" sz="quarter" idx="12"/>
+          </p:nvPr>
+        </p:nvSpPr>
+        <p:spPr/>
+        <p:txBody>
+          <a:bodyPr/>
+          <a:lstStyle/>
+          <a:p>
+            <a:pPr algn="r"/>
+            <a:r>
+              <a:rPr lang="en-US"/>
+              <a:t>3/31/23            ‹#›</a:t>
+            </a:r>
+            <a:endParaRPr lang="en-US" dirty="0"/>
+          </a:p>
+        </p:txBody>
+      </p:sp>
+    </p:spTree>
+    <p:extLst>
+      <p:ext uri="{BB962C8B-B14F-4D97-AF65-F5344CB8AC3E}">
+        <p14:creationId xmlns:p14="http://schemas.microsoft.com/office/powerpoint/2010/main" val="3551433478"/>
+      </p:ext>
+    </p:extLst>
+  </p:cSld>
+  <p:clrMapOvr>
+    <a:masterClrMapping/>
+  </p:clrMapOvr>
+</p:sld>
+</file>
+
+<file path=ppt/slides/slide5.xml><?xml version="1.0" encoding="utf-8"?>
+<p:sld xmlns:a="http://schemas.openxmlformats.org/drawingml/2006/main" xmlns:r="http://schemas.openxmlformats.org/officeDocument/2006/relationships" xmlns:p="http://schemas.openxmlformats.org/presentationml/2006/main">
+  <p:cSld>
+    <p:spTree>
+      <p:nvGrpSpPr>
+        <p:cNvPr id="1" name="">
+          <a:extLst>
+            <a:ext uri="{FF2B5EF4-FFF2-40B4-BE49-F238E27FC236}">
+              <a16:creationId xmlns:a16="http://schemas.microsoft.com/office/drawing/2014/main" id="{A9714733-CFCC-F716-E0B1-05439A6E1B98}"/>
+            </a:ext>
+          </a:extLst>
+        </p:cNvPr>
+        <p:cNvGrpSpPr/>
+        <p:nvPr/>
+      </p:nvGrpSpPr>
+      <p:grpSpPr>
+        <a:xfrm>
+          <a:off x="0" y="0"/>
+          <a:ext cx="0" cy="0"/>
+          <a:chOff x="0" y="0"/>
+          <a:chExt cx="0" cy="0"/>
+        </a:xfrm>
+      </p:grpSpPr>
+      <p:sp>
+        <p:nvSpPr>
+          <p:cNvPr id="3" name="Text Placeholder 2">
+            <a:extLst>
+              <a:ext uri="{FF2B5EF4-FFF2-40B4-BE49-F238E27FC236}">
+                <a16:creationId xmlns:a16="http://schemas.microsoft.com/office/drawing/2014/main" id="{D47A9F3A-DA8C-C8D0-267E-70CAFC7E1F99}"/>
+              </a:ext>
+            </a:extLst>
+          </p:cNvPr>
+          <p:cNvSpPr>
+            <a:spLocks noGrp="1"/>
+          </p:cNvSpPr>
+          <p:nvPr>
+            <p:ph type="body" sz="quarter" idx="10"/>
+          </p:nvPr>
+        </p:nvSpPr>
+        <p:spPr>
+          <a:xfrm>
+            <a:off x="346982" y="1080187"/>
+            <a:ext cx="8450035" cy="4454706"/>
+          </a:xfrm>
+        </p:spPr>
+        <p:txBody>
+          <a:bodyPr/>
+          <a:lstStyle/>
+          <a:p>
+            <a:pPr marL="285750" indent="-285750">
+              <a:buFont typeface="Arial" panose="020B0604020202020204" pitchFamily="34" charset="0"/>
+              <a:buChar char="•"/>
+            </a:pPr>
+            <a:r>
+              <a:rPr lang="en-US" dirty="0"/>
+              <a:t>IEEE RFID Conference may be useful for me to attend:</a:t>
+            </a:r>
+          </a:p>
+          <a:p>
+            <a:pPr marL="628650" lvl="1" indent="-285750">
+              <a:buFont typeface="Arial" panose="020B0604020202020204" pitchFamily="34" charset="0"/>
+              <a:buChar char="•"/>
+            </a:pPr>
+            <a:r>
+              <a:rPr lang="en-US" dirty="0"/>
+              <a:t>June 14-16, very interesting resources</a:t>
+            </a:r>
+          </a:p>
+          <a:p>
+            <a:pPr marL="285750" indent="-285750">
+              <a:buFont typeface="Arial" panose="020B0604020202020204" pitchFamily="34" charset="0"/>
+              <a:buChar char="•"/>
+            </a:pPr>
+            <a:r>
+              <a:rPr lang="en-US" dirty="0"/>
+              <a:t>IEEE Sensors is the conference we are targeting a letter for</a:t>
+            </a:r>
+          </a:p>
+          <a:p>
+            <a:pPr marL="628650" lvl="1" indent="-285750">
+              <a:buFont typeface="Arial" panose="020B0604020202020204" pitchFamily="34" charset="0"/>
+              <a:buChar char="•"/>
+            </a:pPr>
+            <a:r>
+              <a:rPr lang="en-US" dirty="0"/>
+              <a:t>October 25-26</a:t>
+            </a:r>
+          </a:p>
+          <a:p>
+            <a:pPr marL="285750" indent="-285750">
+              <a:buFont typeface="Arial" panose="020B0604020202020204" pitchFamily="34" charset="0"/>
+              <a:buChar char="•"/>
+            </a:pPr>
+            <a:r>
+              <a:rPr lang="en-US" dirty="0"/>
+              <a:t>Purdue ECE has a travel grant available (up to $1000) that I may be able to take advantage of</a:t>
+            </a:r>
+          </a:p>
+          <a:p>
+            <a:pPr marL="628650" lvl="1" indent="-285750">
+              <a:buFont typeface="Arial" panose="020B0604020202020204" pitchFamily="34" charset="0"/>
+              <a:buChar char="•"/>
+            </a:pPr>
+            <a:r>
+              <a:rPr lang="en-US" dirty="0"/>
+              <a:t>Present findings although my tenure will have ended</a:t>
+            </a:r>
+          </a:p>
+        </p:txBody>
+      </p:sp>
+      <p:sp>
+        <p:nvSpPr>
+          <p:cNvPr id="4" name="Title 3">
+            <a:extLst>
+              <a:ext uri="{FF2B5EF4-FFF2-40B4-BE49-F238E27FC236}">
+                <a16:creationId xmlns:a16="http://schemas.microsoft.com/office/drawing/2014/main" id="{54FC5D51-6747-C9F3-564B-82B5AC43E978}"/>
+              </a:ext>
+            </a:extLst>
+          </p:cNvPr>
+          <p:cNvSpPr>
+            <a:spLocks noGrp="1"/>
+          </p:cNvSpPr>
+          <p:nvPr>
+            <p:ph type="title"/>
+          </p:nvPr>
+        </p:nvSpPr>
+        <p:spPr/>
+        <p:txBody>
+          <a:bodyPr>
+            <a:normAutofit/>
+          </a:bodyPr>
+          <a:lstStyle/>
+          <a:p>
+            <a:r>
+              <a:rPr lang="en-US" dirty="0"/>
+              <a:t>Conference Updates</a:t>
+            </a:r>
+          </a:p>
+        </p:txBody>
+      </p:sp>
+      <p:sp>
+        <p:nvSpPr>
+          <p:cNvPr id="5" name="Footer Placeholder 4">
+            <a:extLst>
+              <a:ext uri="{FF2B5EF4-FFF2-40B4-BE49-F238E27FC236}">
+                <a16:creationId xmlns:a16="http://schemas.microsoft.com/office/drawing/2014/main" id="{EFCE16C6-E88B-F29B-0908-20FB5EC71300}"/>
+              </a:ext>
+            </a:extLst>
+          </p:cNvPr>
+          <p:cNvSpPr>
+            <a:spLocks noGrp="1"/>
+          </p:cNvSpPr>
+          <p:nvPr>
+            <p:ph type="ftr" sz="quarter" idx="12"/>
+          </p:nvPr>
+        </p:nvSpPr>
+        <p:spPr/>
+        <p:txBody>
+          <a:bodyPr/>
+          <a:lstStyle/>
+          <a:p>
+            <a:pPr algn="r"/>
+            <a:r>
+              <a:rPr lang="en-US"/>
+              <a:t>3/31/23            ‹#›</a:t>
+            </a:r>
+            <a:endParaRPr lang="en-US" dirty="0"/>
+          </a:p>
+        </p:txBody>
+      </p:sp>
+    </p:spTree>
+    <p:extLst>
+      <p:ext uri="{BB962C8B-B14F-4D97-AF65-F5344CB8AC3E}">
+        <p14:creationId xmlns:p14="http://schemas.microsoft.com/office/powerpoint/2010/main" val="1738867580"/>
+      </p:ext>
+    </p:extLst>
+  </p:cSld>
+  <p:clrMapOvr>
+    <a:masterClrMapping/>
+  </p:clrMapOvr>
+</p:sld>
+</file>
+
+<file path=ppt/slides/slide6.xml><?xml version="1.0" encoding="utf-8"?>
+<p:sld xmlns:a="http://schemas.openxmlformats.org/drawingml/2006/main" xmlns:r="http://schemas.openxmlformats.org/officeDocument/2006/relationships" xmlns:p="http://schemas.openxmlformats.org/presentationml/2006/main">
+  <p:cSld>
+    <p:spTree>
+      <p:nvGrpSpPr>
+        <p:cNvPr id="1" name="">
+          <a:extLst>
+            <a:ext uri="{FF2B5EF4-FFF2-40B4-BE49-F238E27FC236}">
+              <a16:creationId xmlns:a16="http://schemas.microsoft.com/office/drawing/2014/main" id="{FFF3DC2F-1ECC-CF85-66E5-FED4B48F7F97}"/>
+            </a:ext>
+          </a:extLst>
+        </p:cNvPr>
+        <p:cNvGrpSpPr/>
+        <p:nvPr/>
+      </p:nvGrpSpPr>
+      <p:grpSpPr>
+        <a:xfrm>
+          <a:off x="0" y="0"/>
+          <a:ext cx="0" cy="0"/>
+          <a:chOff x="0" y="0"/>
+          <a:chExt cx="0" cy="0"/>
+        </a:xfrm>
+      </p:grpSpPr>
+      <p:sp>
+        <p:nvSpPr>
+          <p:cNvPr id="3" name="Text Placeholder 2">
+            <a:extLst>
+              <a:ext uri="{FF2B5EF4-FFF2-40B4-BE49-F238E27FC236}">
+                <a16:creationId xmlns:a16="http://schemas.microsoft.com/office/drawing/2014/main" id="{5FF30C29-4B98-226A-BE15-DDB8FEDC3E3A}"/>
+              </a:ext>
+            </a:extLst>
+          </p:cNvPr>
+          <p:cNvSpPr>
+            <a:spLocks noGrp="1"/>
+          </p:cNvSpPr>
+          <p:nvPr>
+            <p:ph type="body" sz="quarter" idx="10"/>
+          </p:nvPr>
+        </p:nvSpPr>
+        <p:spPr>
+          <a:xfrm>
+            <a:off x="346982" y="1080187"/>
+            <a:ext cx="8450035" cy="4454706"/>
+          </a:xfrm>
+        </p:spPr>
+        <p:txBody>
+          <a:bodyPr/>
+          <a:lstStyle/>
+          <a:p>
+            <a:pPr marL="285750" indent="-285750">
+              <a:buFont typeface="Arial" panose="020B0604020202020204" pitchFamily="34" charset="0"/>
+              <a:buChar char="•"/>
+            </a:pPr>
+            <a:r>
+              <a:rPr lang="en-US" dirty="0"/>
+              <a:t>Reached out to Professor Berry regarding PCB manufacturing</a:t>
+            </a:r>
+          </a:p>
+          <a:p>
+            <a:pPr marL="285750" indent="-285750">
+              <a:buFont typeface="Arial" panose="020B0604020202020204" pitchFamily="34" charset="0"/>
+              <a:buChar char="•"/>
+            </a:pPr>
+            <a:r>
+              <a:rPr lang="en-US" dirty="0"/>
+              <a:t>Several Domestic Options</a:t>
+            </a:r>
+          </a:p>
+          <a:p>
+            <a:pPr marL="628650" lvl="1" indent="-285750">
+              <a:buFont typeface="Arial" panose="020B0604020202020204" pitchFamily="34" charset="0"/>
+              <a:buChar char="•"/>
+            </a:pPr>
+            <a:r>
+              <a:rPr lang="en-US" dirty="0" err="1"/>
+              <a:t>Macrofab</a:t>
+            </a:r>
+            <a:endParaRPr lang="en-US" dirty="0"/>
+          </a:p>
+          <a:p>
+            <a:pPr marL="628650" lvl="1" indent="-285750">
+              <a:buFont typeface="Arial" panose="020B0604020202020204" pitchFamily="34" charset="0"/>
+              <a:buChar char="•"/>
+            </a:pPr>
+            <a:r>
+              <a:rPr lang="en-US" dirty="0"/>
+              <a:t>Sierra Circuits</a:t>
+            </a:r>
+          </a:p>
+          <a:p>
+            <a:pPr marL="628650" lvl="1" indent="-285750">
+              <a:buFont typeface="Arial" panose="020B0604020202020204" pitchFamily="34" charset="0"/>
+              <a:buChar char="•"/>
+            </a:pPr>
+            <a:r>
+              <a:rPr lang="en-US" dirty="0" err="1"/>
+              <a:t>RushPCB</a:t>
+            </a:r>
+            <a:endParaRPr lang="en-US" dirty="0"/>
+          </a:p>
+          <a:p>
+            <a:pPr marL="628650" lvl="1" indent="-285750">
+              <a:buFont typeface="Arial" panose="020B0604020202020204" pitchFamily="34" charset="0"/>
+              <a:buChar char="•"/>
+            </a:pPr>
+            <a:r>
+              <a:rPr lang="en-US" dirty="0" err="1"/>
+              <a:t>PCBUnlimited</a:t>
+            </a:r>
+            <a:endParaRPr lang="en-US" dirty="0"/>
+          </a:p>
+          <a:p>
+            <a:pPr marL="285750" indent="-285750">
+              <a:buFont typeface="Arial" panose="020B0604020202020204" pitchFamily="34" charset="0"/>
+              <a:buChar char="•"/>
+            </a:pPr>
+            <a:r>
+              <a:rPr lang="en-US" dirty="0"/>
+              <a:t>Reaching out to Sierra Circuits and PCB Unlimited (likely best two options)</a:t>
+            </a:r>
+          </a:p>
+        </p:txBody>
+      </p:sp>
+      <p:sp>
+        <p:nvSpPr>
+          <p:cNvPr id="4" name="Title 3">
+            <a:extLst>
+              <a:ext uri="{FF2B5EF4-FFF2-40B4-BE49-F238E27FC236}">
+                <a16:creationId xmlns:a16="http://schemas.microsoft.com/office/drawing/2014/main" id="{2A8DB5C3-9174-0133-2C61-E7A309577A4E}"/>
+              </a:ext>
+            </a:extLst>
+          </p:cNvPr>
+          <p:cNvSpPr>
+            <a:spLocks noGrp="1"/>
+          </p:cNvSpPr>
+          <p:nvPr>
+            <p:ph type="title"/>
+          </p:nvPr>
+        </p:nvSpPr>
+        <p:spPr/>
+        <p:txBody>
+          <a:bodyPr>
+            <a:normAutofit/>
+          </a:bodyPr>
+          <a:lstStyle/>
+          <a:p>
+            <a:r>
+              <a:rPr lang="en-US" dirty="0"/>
+              <a:t>PCB Manufacturing Updates</a:t>
+            </a:r>
+          </a:p>
+        </p:txBody>
+      </p:sp>
+      <p:sp>
+        <p:nvSpPr>
+          <p:cNvPr id="5" name="Footer Placeholder 4">
+            <a:extLst>
+              <a:ext uri="{FF2B5EF4-FFF2-40B4-BE49-F238E27FC236}">
+                <a16:creationId xmlns:a16="http://schemas.microsoft.com/office/drawing/2014/main" id="{F600CF72-E5E4-E332-12AF-39CE9965E98C}"/>
+              </a:ext>
+            </a:extLst>
+          </p:cNvPr>
+          <p:cNvSpPr>
+            <a:spLocks noGrp="1"/>
+          </p:cNvSpPr>
+          <p:nvPr>
+            <p:ph type="ftr" sz="quarter" idx="12"/>
+          </p:nvPr>
+        </p:nvSpPr>
+        <p:spPr/>
+        <p:txBody>
+          <a:bodyPr/>
+          <a:lstStyle/>
+          <a:p>
+            <a:pPr algn="r"/>
+            <a:r>
+              <a:rPr lang="en-US"/>
+              <a:t>3/31/23            ‹#›</a:t>
+            </a:r>
+            <a:endParaRPr lang="en-US" dirty="0"/>
+          </a:p>
+        </p:txBody>
+      </p:sp>
+    </p:spTree>
+    <p:extLst>
+      <p:ext uri="{BB962C8B-B14F-4D97-AF65-F5344CB8AC3E}">
+        <p14:creationId xmlns:p14="http://schemas.microsoft.com/office/powerpoint/2010/main" val="3326502993"/>
+      </p:ext>
+    </p:extLst>
+  </p:cSld>
+  <p:clrMapOvr>
+    <a:masterClrMapping/>
+  </p:clrMapOvr>
+</p:sld>
+</file>
+
+<file path=ppt/slides/slide7.xml><?xml version="1.0" encoding="utf-8"?>
+<p:sld xmlns:a="http://schemas.openxmlformats.org/drawingml/2006/main" xmlns:r="http://schemas.openxmlformats.org/officeDocument/2006/relationships" xmlns:p="http://schemas.openxmlformats.org/presentationml/2006/main">
+  <p:cSld>
+    <p:spTree>
+      <p:nvGrpSpPr>
+        <p:cNvPr id="1" name="">
+          <a:extLst>
+            <a:ext uri="{FF2B5EF4-FFF2-40B4-BE49-F238E27FC236}">
+              <a16:creationId xmlns:a16="http://schemas.microsoft.com/office/drawing/2014/main" id="{ED52622D-413C-91AC-857F-C734F9E87783}"/>
+            </a:ext>
+          </a:extLst>
+        </p:cNvPr>
+        <p:cNvGrpSpPr/>
+        <p:nvPr/>
+      </p:nvGrpSpPr>
+      <p:grpSpPr>
+        <a:xfrm>
+          <a:off x="0" y="0"/>
+          <a:ext cx="0" cy="0"/>
+          <a:chOff x="0" y="0"/>
+          <a:chExt cx="0" cy="0"/>
+        </a:xfrm>
+      </p:grpSpPr>
+      <p:sp>
+        <p:nvSpPr>
+          <p:cNvPr id="3" name="Text Placeholder 2">
+            <a:extLst>
+              <a:ext uri="{FF2B5EF4-FFF2-40B4-BE49-F238E27FC236}">
+                <a16:creationId xmlns:a16="http://schemas.microsoft.com/office/drawing/2014/main" id="{64BE0323-DA81-CC50-DF71-200F788FD6CC}"/>
+              </a:ext>
+            </a:extLst>
+          </p:cNvPr>
+          <p:cNvSpPr>
+            <a:spLocks noGrp="1"/>
+          </p:cNvSpPr>
+          <p:nvPr>
+            <p:ph type="body" sz="quarter" idx="10"/>
+          </p:nvPr>
+        </p:nvSpPr>
+        <p:spPr>
+          <a:xfrm>
+            <a:off x="346982" y="1080187"/>
+            <a:ext cx="8450035" cy="4454706"/>
+          </a:xfrm>
+        </p:spPr>
+        <p:txBody>
+          <a:bodyPr/>
+          <a:lstStyle/>
+          <a:p>
+            <a:pPr marL="285750" indent="-285750">
+              <a:buFont typeface="Arial" panose="020B0604020202020204" pitchFamily="34" charset="0"/>
+              <a:buChar char="•"/>
+            </a:pPr>
+            <a:r>
+              <a:rPr lang="en-US" dirty="0"/>
+              <a:t>Completed web training</a:t>
+            </a:r>
+          </a:p>
+          <a:p>
+            <a:pPr marL="285750" indent="-285750">
+              <a:buFont typeface="Arial" panose="020B0604020202020204" pitchFamily="34" charset="0"/>
+              <a:buChar char="•"/>
+            </a:pPr>
+            <a:r>
+              <a:rPr lang="en-US" dirty="0"/>
+              <a:t>Added Nolan to </a:t>
+            </a:r>
+            <a:r>
+              <a:rPr lang="en-US" dirty="0" err="1"/>
+              <a:t>github</a:t>
+            </a:r>
+            <a:r>
+              <a:rPr lang="en-US" dirty="0"/>
+              <a:t> repository</a:t>
+            </a:r>
+          </a:p>
+          <a:p>
+            <a:pPr marL="628650" lvl="1" indent="-285750">
+              <a:buFont typeface="Arial" panose="020B0604020202020204" pitchFamily="34" charset="0"/>
+              <a:buChar char="•"/>
+            </a:pPr>
+            <a:r>
+              <a:rPr lang="en-US" dirty="0"/>
+              <a:t>Will give him technical updates per week to get him familiar with the project</a:t>
+            </a:r>
+          </a:p>
+          <a:p>
+            <a:pPr marL="285750" indent="-285750">
+              <a:buFont typeface="Arial" panose="020B0604020202020204" pitchFamily="34" charset="0"/>
+              <a:buChar char="•"/>
+            </a:pPr>
+            <a:r>
+              <a:rPr lang="en-US" dirty="0"/>
+              <a:t>Will send all packaged weekly reports this week</a:t>
+            </a:r>
+          </a:p>
+          <a:p>
+            <a:pPr marL="628650" lvl="1" indent="-285750">
+              <a:buFont typeface="Arial" panose="020B0604020202020204" pitchFamily="34" charset="0"/>
+              <a:buChar char="•"/>
+            </a:pPr>
+            <a:r>
+              <a:rPr lang="en-US" dirty="0"/>
+              <a:t>December – Present as folder</a:t>
+            </a:r>
+          </a:p>
+          <a:p>
+            <a:pPr marL="285750" indent="-285750">
+              <a:buFont typeface="Arial" panose="020B0604020202020204" pitchFamily="34" charset="0"/>
+              <a:buChar char="•"/>
+            </a:pPr>
+            <a:r>
+              <a:rPr lang="en-US" dirty="0"/>
+              <a:t>Still looking at various other conferences I could possibly attend</a:t>
+            </a:r>
+          </a:p>
+        </p:txBody>
+      </p:sp>
+      <p:sp>
+        <p:nvSpPr>
+          <p:cNvPr id="4" name="Title 3">
+            <a:extLst>
+              <a:ext uri="{FF2B5EF4-FFF2-40B4-BE49-F238E27FC236}">
+                <a16:creationId xmlns:a16="http://schemas.microsoft.com/office/drawing/2014/main" id="{316BFDDE-6414-E1FA-F3EB-9D2029E579FC}"/>
+              </a:ext>
+            </a:extLst>
+          </p:cNvPr>
+          <p:cNvSpPr>
+            <a:spLocks noGrp="1"/>
+          </p:cNvSpPr>
+          <p:nvPr>
+            <p:ph type="title"/>
+          </p:nvPr>
+        </p:nvSpPr>
+        <p:spPr/>
+        <p:txBody>
+          <a:bodyPr>
+            <a:normAutofit/>
+          </a:bodyPr>
+          <a:lstStyle/>
+          <a:p>
+            <a:r>
+              <a:rPr lang="en-US" dirty="0"/>
+              <a:t>Miscellaneous</a:t>
+            </a:r>
+          </a:p>
+        </p:txBody>
+      </p:sp>
+      <p:sp>
+        <p:nvSpPr>
+          <p:cNvPr id="5" name="Footer Placeholder 4">
+            <a:extLst>
+              <a:ext uri="{FF2B5EF4-FFF2-40B4-BE49-F238E27FC236}">
+                <a16:creationId xmlns:a16="http://schemas.microsoft.com/office/drawing/2014/main" id="{61AAD966-A458-0295-1EC2-E6AA3E6151F1}"/>
+              </a:ext>
+            </a:extLst>
+          </p:cNvPr>
+          <p:cNvSpPr>
+            <a:spLocks noGrp="1"/>
+          </p:cNvSpPr>
+          <p:nvPr>
+            <p:ph type="ftr" sz="quarter" idx="12"/>
+          </p:nvPr>
+        </p:nvSpPr>
+        <p:spPr/>
+        <p:txBody>
+          <a:bodyPr/>
+          <a:lstStyle/>
+          <a:p>
+            <a:pPr algn="r"/>
+            <a:r>
+              <a:rPr lang="en-US"/>
+              <a:t>3/31/23            ‹#›</a:t>
+            </a:r>
+            <a:endParaRPr lang="en-US" dirty="0"/>
+          </a:p>
+        </p:txBody>
+      </p:sp>
+    </p:spTree>
+    <p:extLst>
+      <p:ext uri="{BB962C8B-B14F-4D97-AF65-F5344CB8AC3E}">
+        <p14:creationId xmlns:p14="http://schemas.microsoft.com/office/powerpoint/2010/main" val="3149814508"/>
+      </p:ext>
+    </p:extLst>
+  </p:cSld>
+  <p:clrMapOvr>
+    <a:masterClrMapping/>
+  </p:clrMapOvr>
+</p:sld>
+</file>
+
+<file path=ppt/slides/slide8.xml><?xml version="1.0" encoding="utf-8"?>
 <p:sld xmlns:a="http://schemas.openxmlformats.org/drawingml/2006/main" xmlns:r="http://schemas.openxmlformats.org/officeDocument/2006/relationships" xmlns:p="http://schemas.openxmlformats.org/presentationml/2006/main">
   <p:cSld>
     <p:spTree>
@@ -14141,7 +15072,37 @@
             </a:pPr>
             <a:r>
               <a:rPr lang="en-US" dirty="0"/>
-              <a:t>Begin foundations of research paper (Overleaf)</a:t>
+              <a:t>Begin revision 5 of PCB design</a:t>
+            </a:r>
+          </a:p>
+          <a:p>
+            <a:pPr marL="628650" lvl="1" indent="-285750">
+              <a:buFont typeface="Arial" panose="020B0604020202020204" pitchFamily="34" charset="0"/>
+              <a:buChar char="•"/>
+            </a:pPr>
+            <a:r>
+              <a:rPr lang="en-US" dirty="0"/>
+              <a:t>Remote charging</a:t>
+            </a:r>
+          </a:p>
+          <a:p>
+            <a:pPr marL="628650" lvl="1" indent="-285750">
+              <a:buFont typeface="Arial" panose="020B0604020202020204" pitchFamily="34" charset="0"/>
+              <a:buChar char="•"/>
+            </a:pPr>
+            <a:r>
+              <a:rPr lang="en-US" dirty="0"/>
+              <a:t>Force, Strain, Temperature external sensors</a:t>
+            </a:r>
+          </a:p>
+          <a:p>
+            <a:pPr marL="628650" lvl="1" indent="-285750">
+              <a:buFont typeface="Arial" panose="020B0604020202020204" pitchFamily="34" charset="0"/>
+              <a:buChar char="•"/>
+            </a:pPr>
+            <a:r>
+              <a:rPr lang="en-US" dirty="0"/>
+              <a:t>In-house battery unit (16 mm diameter)</a:t>
             </a:r>
           </a:p>
           <a:p>
@@ -14151,7 +15112,7 @@
             </a:pPr>
             <a:r>
               <a:rPr lang="en-US" dirty="0"/>
-              <a:t>Ensure that agriculture study has gone successfully and there are no blockers</a:t>
+              <a:t>Obtain data from agriculture and validate data</a:t>
             </a:r>
           </a:p>
           <a:p>
@@ -14161,7 +15122,7 @@
             </a:pPr>
             <a:r>
               <a:rPr lang="en-US" dirty="0"/>
-              <a:t>Research American PCB vendors to order assembled PCB from</a:t>
+              <a:t>Finish README documentation on device</a:t>
             </a:r>
           </a:p>
           <a:p>
@@ -14171,15 +15132,7 @@
             </a:pPr>
             <a:r>
               <a:rPr lang="en-US" dirty="0"/>
-              <a:t>Unable to use Chinese vendors (</a:t>
-            </a:r>
-            <a:r>
-              <a:rPr lang="en-US" dirty="0" err="1"/>
-              <a:t>PCBWay</a:t>
-            </a:r>
-            <a:r>
-              <a:rPr lang="en-US" dirty="0"/>
-              <a:t>, JLCPCB) anymore</a:t>
+              <a:t>Standardize and make into technical document </a:t>
             </a:r>
           </a:p>
         </p:txBody>
@@ -14254,7 +15207,7 @@
 </p:sld>
 </file>
 
-<file path=ppt/slides/slide4.xml><?xml version="1.0" encoding="utf-8"?>
+<file path=ppt/slides/slide9.xml><?xml version="1.0" encoding="utf-8"?>
 <p:sld xmlns:a="http://schemas.openxmlformats.org/drawingml/2006/main" xmlns:r="http://schemas.openxmlformats.org/officeDocument/2006/relationships" xmlns:p="http://schemas.openxmlformats.org/presentationml/2006/main">
   <p:cSld>
     <p:spTree>
